--- a/video-presentation/patchbay-simulated.pptx
+++ b/video-presentation/patchbay-simulated.pptx
@@ -2695,7 +2695,7 @@
                 <a:ea typeface="Calibri" pitchFamily="34" charset="-122"/>
                 <a:cs typeface="Calibri" pitchFamily="34" charset="-120"/>
               </a:rPr>
-              <a:t>Unlike dependency bots that start from your repo and bump versions, Patchbay starts from the provider's API change and hands every developer team a PR that is already fixed and tested in a clean VM.</a:t>
+              <a:t>Dependency bots start from each repo; Patchbay starts from the provider, with one agent-readable change feed that any coding agent can turn into a tested pull request for every developer team.</a:t>
             </a:r>
             <a:endParaRPr lang="en-US" sz="1100" dirty="0"/>
           </a:p>
